--- a/public/fun/pack/pptx/news/카드뉴스_30_오늘의한마디_빨간우체통.pptx
+++ b/public/fun/pack/pptx/news/카드뉴스_30_오늘의한마디_빨간우체통.pptx
@@ -3287,6 +3287,14 @@
 <file path=ppt/slides/slide1.xml><?xml version="1.0" encoding="utf-8"?>
 <p:sld xmlns:a="http://schemas.openxmlformats.org/drawingml/2006/main" xmlns:p="http://schemas.openxmlformats.org/presentationml/2006/main" xmlns:r="http://schemas.openxmlformats.org/officeDocument/2006/relationships">
   <p:cSld>
+    <p:bg>
+      <p:bgPr>
+        <a:solidFill>
+          <a:srgbClr val="492E27"/>
+        </a:solidFill>
+        <a:effectLst/>
+      </p:bgPr>
+    </p:bg>
     <p:spTree>
       <p:nvGrpSpPr>
         <p:cNvPr id="1" name=""/>
@@ -3294,30 +3302,102 @@
         <p:nvPr/>
       </p:nvGrpSpPr>
       <p:grpSpPr/>
-      <p:pic>
-        <p:nvPicPr>
-          <p:cNvPr id="3" name="표지 그림" descr="news-30.jpg"/>
-          <p:cNvPicPr>
-            <a:picLocks noChangeAspect="1"/>
-          </p:cNvPicPr>
+      <p:sp>
+        <p:nvSpPr>
+          <p:cNvPr id="3" name="장식"/>
+          <p:cNvSpPr/>
           <p:nvPr/>
-        </p:nvPicPr>
-        <p:blipFill>
-          <a:blip r:embed="rId2"/>
-          <a:stretch>
-            <a:fillRect/>
-          </a:stretch>
-        </p:blipFill>
-        <p:spPr>
-          <a:xfrm>
-            <a:off x="0" y="0"/>
-            <a:ext cx="6858000" cy="6858000"/>
+        </p:nvSpPr>
+        <p:spPr>
+          <a:xfrm>
+            <a:off x="1600200" y="822960"/>
+            <a:ext cx="3657600" cy="3657600"/>
+          </a:xfrm>
+          <a:prstGeom prst="ellipse">
+            <a:avLst/>
+          </a:prstGeom>
+          <a:solidFill>
+            <a:srgbClr val="D88C79"/>
+          </a:solidFill>
+          <a:ln>
+            <a:noFill/>
+          </a:ln>
+        </p:spPr>
+        <p:txBody>
+          <a:bodyPr rtlCol="0" anchor="ctr"/>
+          <a:lstStyle/>
+          <a:p>
+            <a:pPr algn="ctr"/>
+          </a:p>
+        </p:txBody>
+      </p:sp>
+      <p:sp>
+        <p:nvSpPr>
+          <p:cNvPr id="4" name="장식"/>
+          <p:cNvSpPr/>
+          <p:nvPr/>
+        </p:nvSpPr>
+        <p:spPr>
+          <a:xfrm>
+            <a:off x="3246120" y="502920"/>
+            <a:ext cx="822960" cy="822960"/>
+          </a:xfrm>
+          <a:prstGeom prst="ellipse">
+            <a:avLst/>
+          </a:prstGeom>
+          <a:solidFill>
+            <a:srgbClr val="A66B5C"/>
+          </a:solidFill>
+          <a:ln>
+            <a:noFill/>
+          </a:ln>
+        </p:spPr>
+        <p:txBody>
+          <a:bodyPr rtlCol="0" anchor="ctr"/>
+          <a:lstStyle/>
+          <a:p>
+            <a:pPr algn="ctr"/>
+          </a:p>
+        </p:txBody>
+      </p:sp>
+      <p:sp>
+        <p:nvSpPr>
+          <p:cNvPr id="5" name="라벨"/>
+          <p:cNvSpPr txBox="1"/>
+          <p:nvPr/>
+        </p:nvSpPr>
+        <p:spPr>
+          <a:xfrm>
+            <a:off x="731520" y="4572000"/>
+            <a:ext cx="5394960" cy="274320"/>
           </a:xfrm>
           <a:prstGeom prst="rect">
             <a:avLst/>
           </a:prstGeom>
-        </p:spPr>
-      </p:pic>
+          <a:noFill/>
+        </p:spPr>
+        <p:txBody>
+          <a:bodyPr wrap="square" lIns="54864" rIns="54864" tIns="27432" bIns="27432" anchor="t">
+            <a:noAutofit/>
+          </a:bodyPr>
+          <a:lstStyle/>
+          <a:p>
+            <a:pPr algn="ctr">
+              <a:lnSpc>
+                <a:spcPct val="115000"/>
+              </a:lnSpc>
+            </a:pPr>
+            <a:r>
+              <a:rPr sz="1000" b="1" i="0" spc="250">
+                <a:solidFill>
+                  <a:srgbClr val="FFFFFF"/>
+                </a:solidFill>
+              </a:rPr>
+              <a:t>CARD NEWS</a:t>
+            </a:r>
+          </a:p>
+        </p:txBody>
+      </p:sp>
       <p:sp>
         <p:nvSpPr>
           <p:cNvPr id="2" name="Title 1"/>
@@ -3330,8 +3410,8 @@
         </p:nvSpPr>
         <p:spPr>
           <a:xfrm>
-            <a:off x="685800" y="960120"/>
-            <a:ext cx="5486400" cy="1463040"/>
+            <a:off x="731520" y="4892040"/>
+            <a:ext cx="5394960" cy="914400"/>
           </a:xfrm>
         </p:spPr>
         <p:txBody>
@@ -3340,7 +3420,7 @@
           </a:bodyPr>
           <a:lstStyle/>
           <a:p>
-            <a:pPr algn="l">
+            <a:pPr algn="ctr">
               <a:lnSpc>
                 <a:spcPct val="105000"/>
               </a:lnSpc>
@@ -3348,7 +3428,7 @@
             <a:r>
               <a:rPr sz="3000" b="1" i="0">
                 <a:solidFill>
-                  <a:srgbClr val="70311A"/>
+                  <a:srgbClr val="FFFFFF"/>
                 </a:solidFill>
               </a:rPr>
               <a:t>전화 한 통이면 됩니다</a:t>
@@ -3358,14 +3438,14 @@
       </p:sp>
       <p:sp>
         <p:nvSpPr>
-          <p:cNvPr id="4" name="한 줄 문구"/>
+          <p:cNvPr id="6" name="한 줄 문구"/>
           <p:cNvSpPr txBox="1"/>
           <p:nvPr/>
         </p:nvSpPr>
         <p:spPr>
           <a:xfrm>
-            <a:off x="685800" y="2560320"/>
-            <a:ext cx="5486400" cy="822960"/>
+            <a:off x="731520" y="5806440"/>
+            <a:ext cx="5394960" cy="822960"/>
           </a:xfrm>
           <a:prstGeom prst="rect">
             <a:avLst/>
@@ -3378,15 +3458,15 @@
           </a:bodyPr>
           <a:lstStyle/>
           <a:p>
-            <a:pPr algn="l">
+            <a:pPr algn="ctr">
               <a:lnSpc>
                 <a:spcPct val="115000"/>
               </a:lnSpc>
             </a:pPr>
             <a:r>
-              <a:rPr sz="1500" b="0" i="1">
+              <a:rPr sz="1500" b="0" i="0">
                 <a:solidFill>
-                  <a:srgbClr val="70311A"/>
+                  <a:srgbClr val="FFFFFF"/>
                 </a:solidFill>
               </a:rPr>
               <a:t>옆으로 넘겨 보세요 →</a:t>
@@ -3396,14 +3476,14 @@
       </p:sp>
       <p:sp>
         <p:nvSpPr>
-          <p:cNvPr id="5" name="안내 문구"/>
+          <p:cNvPr id="7" name="안내 문구"/>
           <p:cNvSpPr txBox="1"/>
           <p:nvPr/>
         </p:nvSpPr>
         <p:spPr>
           <a:xfrm>
-            <a:off x="685800" y="3429000"/>
-            <a:ext cx="5486400" cy="914400"/>
+            <a:off x="731520" y="6675120"/>
+            <a:ext cx="5394960" cy="914400"/>
           </a:xfrm>
           <a:prstGeom prst="rect">
             <a:avLst/>
@@ -3416,7 +3496,7 @@
           </a:bodyPr>
           <a:lstStyle/>
           <a:p>
-            <a:pPr algn="l">
+            <a:pPr algn="ctr">
               <a:lnSpc>
                 <a:spcPct val="115000"/>
               </a:lnSpc>
@@ -3424,7 +3504,7 @@
             <a:r>
               <a:rPr sz="1200" b="0" i="0">
                 <a:solidFill>
-                  <a:srgbClr val="666666"/>
+                  <a:srgbClr val="FFFFFF"/>
                 </a:solidFill>
               </a:rPr>
               <a:t>오늘의 한마디 · 카드뉴스</a:t>
@@ -3446,7 +3526,7 @@
     <p:bg>
       <p:bgPr>
         <a:solidFill>
-          <a:srgbClr val="FEF8F6"/>
+          <a:srgbClr val="FBEFEC"/>
         </a:solidFill>
         <a:effectLst/>
       </p:bgPr>
@@ -3460,23 +3540,20 @@
       <p:grpSpPr/>
       <p:sp>
         <p:nvSpPr>
-          <p:cNvPr id="3" name="장식"/>
+          <p:cNvPr id="3" name="포인트"/>
           <p:cNvSpPr/>
           <p:nvPr/>
         </p:nvSpPr>
         <p:spPr>
-          <a:xfrm rot="10800000">
-            <a:off x="5303520" y="0"/>
-            <a:ext cx="914400" cy="1554480"/>
+          <a:xfrm>
+            <a:off x="3291840" y="246888"/>
+            <a:ext cx="274320" cy="274320"/>
           </a:xfrm>
           <a:prstGeom prst="round2SameRect">
-            <a:avLst>
-              <a:gd name="adj1" fmla="val 50000"/>
-              <a:gd name="adj2" fmla="val 0"/>
-            </a:avLst>
+            <a:avLst/>
           </a:prstGeom>
           <a:solidFill>
-            <a:srgbClr val="FDE6DD"/>
+            <a:srgbClr val="D88C79"/>
           </a:solidFill>
           <a:ln>
             <a:noFill/>
@@ -3492,52 +3569,43 @@
       </p:sp>
       <p:sp>
         <p:nvSpPr>
-          <p:cNvPr id="2" name="Title 1"/>
-          <p:cNvSpPr>
-            <a:spLocks noGrp="1"/>
-          </p:cNvSpPr>
-          <p:nvPr>
-            <p:ph type="title"/>
-          </p:nvPr>
-        </p:nvSpPr>
-        <p:spPr>
-          <a:xfrm>
-            <a:off x="640080" y="457200"/>
-            <a:ext cx="4389120" cy="868680"/>
-          </a:xfrm>
-        </p:spPr>
-        <p:txBody>
-          <a:bodyPr wrap="square" lIns="54864" rIns="54864" tIns="27432" bIns="27432" anchor="ctr">
-            <a:noAutofit/>
-          </a:bodyPr>
-          <a:lstStyle/>
-          <a:p>
-            <a:pPr algn="l">
-              <a:lnSpc>
-                <a:spcPct val="105000"/>
-              </a:lnSpc>
-            </a:pPr>
-            <a:r>
-              <a:rPr sz="2600" b="1" i="0">
-                <a:solidFill>
-                  <a:srgbClr val="70311A"/>
-                </a:solidFill>
-              </a:rPr>
-              <a:t>점심은 거르지 마세요</a:t>
-            </a:r>
-          </a:p>
-        </p:txBody>
-      </p:sp>
-      <p:sp>
-        <p:nvSpPr>
-          <p:cNvPr id="4" name="번호"/>
+          <p:cNvPr id="4" name="장식"/>
+          <p:cNvSpPr/>
+          <p:nvPr/>
+        </p:nvSpPr>
+        <p:spPr>
+          <a:xfrm>
+            <a:off x="3017520" y="1572768"/>
+            <a:ext cx="822960" cy="22860"/>
+          </a:xfrm>
+          <a:prstGeom prst="rect">
+            <a:avLst/>
+          </a:prstGeom>
+          <a:solidFill>
+            <a:srgbClr val="D88C79"/>
+          </a:solidFill>
+          <a:ln>
+            <a:noFill/>
+          </a:ln>
+        </p:spPr>
+        <p:txBody>
+          <a:bodyPr rtlCol="0" anchor="ctr"/>
+          <a:lstStyle/>
+          <a:p>
+            <a:pPr algn="ctr"/>
+          </a:p>
+        </p:txBody>
+      </p:sp>
+      <p:sp>
+        <p:nvSpPr>
+          <p:cNvPr id="5" name="상단 라벨"/>
           <p:cNvSpPr txBox="1"/>
           <p:nvPr/>
         </p:nvSpPr>
         <p:spPr>
           <a:xfrm>
-            <a:off x="640080" y="1691640"/>
-            <a:ext cx="2194560" cy="1280160"/>
+            <a:off x="640080" y="182880"/>
+            <a:ext cx="3657600" cy="274320"/>
           </a:xfrm>
           <a:prstGeom prst="rect">
             <a:avLst/>
@@ -3545,7 +3613,7 @@
           <a:noFill/>
         </p:spPr>
         <p:txBody>
-          <a:bodyPr wrap="square" lIns="54864" rIns="54864" tIns="27432" bIns="27432" anchor="t">
+          <a:bodyPr wrap="square" lIns="54864" rIns="54864" tIns="27432" bIns="27432" anchor="ctr">
             <a:noAutofit/>
           </a:bodyPr>
           <a:lstStyle/>
@@ -3556,9 +3624,85 @@
               </a:lnSpc>
             </a:pPr>
             <a:r>
+              <a:rPr sz="800" b="1" i="0" spc="250">
+                <a:solidFill>
+                  <a:srgbClr val="8E8780"/>
+                </a:solidFill>
+              </a:rPr>
+              <a:t>CARD NEWS</a:t>
+            </a:r>
+          </a:p>
+        </p:txBody>
+      </p:sp>
+      <p:sp>
+        <p:nvSpPr>
+          <p:cNvPr id="2" name="Title 1"/>
+          <p:cNvSpPr>
+            <a:spLocks noGrp="1"/>
+          </p:cNvSpPr>
+          <p:nvPr>
+            <p:ph type="title"/>
+          </p:nvPr>
+        </p:nvSpPr>
+        <p:spPr>
+          <a:xfrm>
+            <a:off x="1371600" y="640080"/>
+            <a:ext cx="4114800" cy="868680"/>
+          </a:xfrm>
+        </p:spPr>
+        <p:txBody>
+          <a:bodyPr wrap="square" lIns="54864" rIns="54864" tIns="27432" bIns="27432" anchor="ctr">
+            <a:noAutofit/>
+          </a:bodyPr>
+          <a:lstStyle/>
+          <a:p>
+            <a:pPr algn="ctr">
+              <a:lnSpc>
+                <a:spcPct val="105000"/>
+              </a:lnSpc>
+            </a:pPr>
+            <a:r>
+              <a:rPr sz="2600" b="1" i="0">
+                <a:solidFill>
+                  <a:srgbClr val="26231F"/>
+                </a:solidFill>
+              </a:rPr>
+              <a:t>점심은 거르지 마세요</a:t>
+            </a:r>
+          </a:p>
+        </p:txBody>
+      </p:sp>
+      <p:sp>
+        <p:nvSpPr>
+          <p:cNvPr id="6" name="번호"/>
+          <p:cNvSpPr txBox="1"/>
+          <p:nvPr/>
+        </p:nvSpPr>
+        <p:spPr>
+          <a:xfrm>
+            <a:off x="640080" y="1874519"/>
+            <a:ext cx="2194560" cy="1280160"/>
+          </a:xfrm>
+          <a:prstGeom prst="rect">
+            <a:avLst/>
+          </a:prstGeom>
+          <a:noFill/>
+        </p:spPr>
+        <p:txBody>
+          <a:bodyPr wrap="square" lIns="54864" rIns="54864" tIns="27432" bIns="27432" anchor="t">
+            <a:noAutofit/>
+          </a:bodyPr>
+          <a:lstStyle/>
+          <a:p>
+            <a:pPr algn="l">
+              <a:lnSpc>
+                <a:spcPct val="115000"/>
+              </a:lnSpc>
+            </a:pPr>
+            <a:r>
               <a:rPr sz="6600" b="1" i="0">
                 <a:solidFill>
-                  <a:srgbClr val="ED6231"/>
+                  <a:srgbClr val="D88C79"/>
                 </a:solidFill>
               </a:rPr>
               <a:t>01</a:t>
@@ -3568,13 +3712,13 @@
       </p:sp>
       <p:sp>
         <p:nvSpPr>
-          <p:cNvPr id="5" name="본문"/>
+          <p:cNvPr id="7" name="본문"/>
           <p:cNvSpPr txBox="1"/>
           <p:nvPr/>
         </p:nvSpPr>
         <p:spPr>
           <a:xfrm>
-            <a:off x="640080" y="3154680"/>
+            <a:off x="640080" y="3337560"/>
             <a:ext cx="5577840" cy="2651760"/>
           </a:xfrm>
           <a:prstGeom prst="rect">
@@ -3596,7 +3740,7 @@
             <a:r>
               <a:rPr sz="2800" b="0" i="0">
                 <a:solidFill>
-                  <a:srgbClr val="2B2B2B"/>
+                  <a:srgbClr val="26231F"/>
                 </a:solidFill>
               </a:rPr>
               <a:t>바빠도 한 끼는 앉아서 먹어요. 오후가 달라져요.</a:t>
@@ -3606,13 +3750,13 @@
       </p:sp>
       <p:sp>
         <p:nvSpPr>
-          <p:cNvPr id="6" name="쪽 번호"/>
+          <p:cNvPr id="8" name="쪽 번호"/>
           <p:cNvSpPr txBox="1"/>
           <p:nvPr/>
         </p:nvSpPr>
         <p:spPr>
           <a:xfrm>
-            <a:off x="640080" y="6035040"/>
+            <a:off x="640080" y="5989320"/>
             <a:ext cx="5577840" cy="365760"/>
           </a:xfrm>
           <a:prstGeom prst="rect">
@@ -3656,7 +3800,7 @@
     <p:bg>
       <p:bgPr>
         <a:solidFill>
-          <a:srgbClr val="FEF8F6"/>
+          <a:srgbClr val="FBEFEC"/>
         </a:solidFill>
         <a:effectLst/>
       </p:bgPr>
@@ -3670,23 +3814,20 @@
       <p:grpSpPr/>
       <p:sp>
         <p:nvSpPr>
-          <p:cNvPr id="3" name="장식"/>
+          <p:cNvPr id="3" name="포인트"/>
           <p:cNvSpPr/>
           <p:nvPr/>
         </p:nvSpPr>
         <p:spPr>
-          <a:xfrm rot="10800000">
-            <a:off x="5303520" y="0"/>
-            <a:ext cx="914400" cy="1554480"/>
+          <a:xfrm>
+            <a:off x="3291840" y="246888"/>
+            <a:ext cx="274320" cy="274320"/>
           </a:xfrm>
           <a:prstGeom prst="round2SameRect">
-            <a:avLst>
-              <a:gd name="adj1" fmla="val 50000"/>
-              <a:gd name="adj2" fmla="val 0"/>
-            </a:avLst>
+            <a:avLst/>
           </a:prstGeom>
           <a:solidFill>
-            <a:srgbClr val="FDE6DD"/>
+            <a:srgbClr val="D88C79"/>
           </a:solidFill>
           <a:ln>
             <a:noFill/>
@@ -3702,52 +3843,43 @@
       </p:sp>
       <p:sp>
         <p:nvSpPr>
-          <p:cNvPr id="2" name="Title 1"/>
-          <p:cNvSpPr>
-            <a:spLocks noGrp="1"/>
-          </p:cNvSpPr>
-          <p:nvPr>
-            <p:ph type="title"/>
-          </p:nvPr>
-        </p:nvSpPr>
-        <p:spPr>
-          <a:xfrm>
-            <a:off x="640080" y="457200"/>
-            <a:ext cx="4389120" cy="868680"/>
-          </a:xfrm>
-        </p:spPr>
-        <p:txBody>
-          <a:bodyPr wrap="square" lIns="54864" rIns="54864" tIns="27432" bIns="27432" anchor="ctr">
-            <a:noAutofit/>
-          </a:bodyPr>
-          <a:lstStyle/>
-          <a:p>
-            <a:pPr algn="l">
-              <a:lnSpc>
-                <a:spcPct val="105000"/>
-              </a:lnSpc>
-            </a:pPr>
-            <a:r>
-              <a:rPr sz="2600" b="1" i="0">
-                <a:solidFill>
-                  <a:srgbClr val="70311A"/>
-                </a:solidFill>
-              </a:rPr>
-              <a:t>전화 한 통 걸어 보세요</a:t>
-            </a:r>
-          </a:p>
-        </p:txBody>
-      </p:sp>
-      <p:sp>
-        <p:nvSpPr>
-          <p:cNvPr id="4" name="번호"/>
+          <p:cNvPr id="4" name="장식"/>
+          <p:cNvSpPr/>
+          <p:nvPr/>
+        </p:nvSpPr>
+        <p:spPr>
+          <a:xfrm>
+            <a:off x="3017520" y="1572768"/>
+            <a:ext cx="822960" cy="22860"/>
+          </a:xfrm>
+          <a:prstGeom prst="rect">
+            <a:avLst/>
+          </a:prstGeom>
+          <a:solidFill>
+            <a:srgbClr val="D88C79"/>
+          </a:solidFill>
+          <a:ln>
+            <a:noFill/>
+          </a:ln>
+        </p:spPr>
+        <p:txBody>
+          <a:bodyPr rtlCol="0" anchor="ctr"/>
+          <a:lstStyle/>
+          <a:p>
+            <a:pPr algn="ctr"/>
+          </a:p>
+        </p:txBody>
+      </p:sp>
+      <p:sp>
+        <p:nvSpPr>
+          <p:cNvPr id="5" name="상단 라벨"/>
           <p:cNvSpPr txBox="1"/>
           <p:nvPr/>
         </p:nvSpPr>
         <p:spPr>
           <a:xfrm>
-            <a:off x="640080" y="1691640"/>
-            <a:ext cx="2194560" cy="1280160"/>
+            <a:off x="640080" y="182880"/>
+            <a:ext cx="3657600" cy="274320"/>
           </a:xfrm>
           <a:prstGeom prst="rect">
             <a:avLst/>
@@ -3755,7 +3887,7 @@
           <a:noFill/>
         </p:spPr>
         <p:txBody>
-          <a:bodyPr wrap="square" lIns="54864" rIns="54864" tIns="27432" bIns="27432" anchor="t">
+          <a:bodyPr wrap="square" lIns="54864" rIns="54864" tIns="27432" bIns="27432" anchor="ctr">
             <a:noAutofit/>
           </a:bodyPr>
           <a:lstStyle/>
@@ -3766,9 +3898,85 @@
               </a:lnSpc>
             </a:pPr>
             <a:r>
+              <a:rPr sz="800" b="1" i="0" spc="250">
+                <a:solidFill>
+                  <a:srgbClr val="8E8780"/>
+                </a:solidFill>
+              </a:rPr>
+              <a:t>CARD NEWS</a:t>
+            </a:r>
+          </a:p>
+        </p:txBody>
+      </p:sp>
+      <p:sp>
+        <p:nvSpPr>
+          <p:cNvPr id="2" name="Title 1"/>
+          <p:cNvSpPr>
+            <a:spLocks noGrp="1"/>
+          </p:cNvSpPr>
+          <p:nvPr>
+            <p:ph type="title"/>
+          </p:nvPr>
+        </p:nvSpPr>
+        <p:spPr>
+          <a:xfrm>
+            <a:off x="1371600" y="640080"/>
+            <a:ext cx="4114800" cy="868680"/>
+          </a:xfrm>
+        </p:spPr>
+        <p:txBody>
+          <a:bodyPr wrap="square" lIns="54864" rIns="54864" tIns="27432" bIns="27432" anchor="ctr">
+            <a:noAutofit/>
+          </a:bodyPr>
+          <a:lstStyle/>
+          <a:p>
+            <a:pPr algn="ctr">
+              <a:lnSpc>
+                <a:spcPct val="105000"/>
+              </a:lnSpc>
+            </a:pPr>
+            <a:r>
+              <a:rPr sz="2600" b="1" i="0">
+                <a:solidFill>
+                  <a:srgbClr val="26231F"/>
+                </a:solidFill>
+              </a:rPr>
+              <a:t>전화 한 통 걸어 보세요</a:t>
+            </a:r>
+          </a:p>
+        </p:txBody>
+      </p:sp>
+      <p:sp>
+        <p:nvSpPr>
+          <p:cNvPr id="6" name="번호"/>
+          <p:cNvSpPr txBox="1"/>
+          <p:nvPr/>
+        </p:nvSpPr>
+        <p:spPr>
+          <a:xfrm>
+            <a:off x="640080" y="1874519"/>
+            <a:ext cx="2194560" cy="1280160"/>
+          </a:xfrm>
+          <a:prstGeom prst="rect">
+            <a:avLst/>
+          </a:prstGeom>
+          <a:noFill/>
+        </p:spPr>
+        <p:txBody>
+          <a:bodyPr wrap="square" lIns="54864" rIns="54864" tIns="27432" bIns="27432" anchor="t">
+            <a:noAutofit/>
+          </a:bodyPr>
+          <a:lstStyle/>
+          <a:p>
+            <a:pPr algn="l">
+              <a:lnSpc>
+                <a:spcPct val="115000"/>
+              </a:lnSpc>
+            </a:pPr>
+            <a:r>
               <a:rPr sz="6600" b="1" i="0">
                 <a:solidFill>
-                  <a:srgbClr val="ED6231"/>
+                  <a:srgbClr val="D88C79"/>
                 </a:solidFill>
               </a:rPr>
               <a:t>02</a:t>
@@ -3778,13 +3986,13 @@
       </p:sp>
       <p:sp>
         <p:nvSpPr>
-          <p:cNvPr id="5" name="본문"/>
+          <p:cNvPr id="7" name="본문"/>
           <p:cNvSpPr txBox="1"/>
           <p:nvPr/>
         </p:nvSpPr>
         <p:spPr>
           <a:xfrm>
-            <a:off x="640080" y="3154680"/>
+            <a:off x="640080" y="3337560"/>
             <a:ext cx="5577840" cy="2651760"/>
           </a:xfrm>
           <a:prstGeom prst="rect">
@@ -3806,7 +4014,7 @@
             <a:r>
               <a:rPr sz="2800" b="0" i="0">
                 <a:solidFill>
-                  <a:srgbClr val="2B2B2B"/>
+                  <a:srgbClr val="26231F"/>
                 </a:solidFill>
               </a:rPr>
               <a:t>문자보다 목소리가 먼저 떠오르는 사람이 있다면 지금 걸어 보세요.</a:t>
@@ -3816,13 +4024,13 @@
       </p:sp>
       <p:sp>
         <p:nvSpPr>
-          <p:cNvPr id="6" name="쪽 번호"/>
+          <p:cNvPr id="8" name="쪽 번호"/>
           <p:cNvSpPr txBox="1"/>
           <p:nvPr/>
         </p:nvSpPr>
         <p:spPr>
           <a:xfrm>
-            <a:off x="640080" y="6035040"/>
+            <a:off x="640080" y="5989320"/>
             <a:ext cx="5577840" cy="365760"/>
           </a:xfrm>
           <a:prstGeom prst="rect">
@@ -3866,7 +4074,7 @@
     <p:bg>
       <p:bgPr>
         <a:solidFill>
-          <a:srgbClr val="FEF8F6"/>
+          <a:srgbClr val="FBEFEC"/>
         </a:solidFill>
         <a:effectLst/>
       </p:bgPr>
@@ -3880,23 +4088,20 @@
       <p:grpSpPr/>
       <p:sp>
         <p:nvSpPr>
-          <p:cNvPr id="3" name="장식"/>
+          <p:cNvPr id="3" name="포인트"/>
           <p:cNvSpPr/>
           <p:nvPr/>
         </p:nvSpPr>
         <p:spPr>
-          <a:xfrm rot="10800000">
-            <a:off x="5303520" y="0"/>
-            <a:ext cx="914400" cy="1554480"/>
+          <a:xfrm>
+            <a:off x="3291840" y="246888"/>
+            <a:ext cx="274320" cy="274320"/>
           </a:xfrm>
           <a:prstGeom prst="round2SameRect">
-            <a:avLst>
-              <a:gd name="adj1" fmla="val 50000"/>
-              <a:gd name="adj2" fmla="val 0"/>
-            </a:avLst>
+            <a:avLst/>
           </a:prstGeom>
           <a:solidFill>
-            <a:srgbClr val="FDE6DD"/>
+            <a:srgbClr val="D88C79"/>
           </a:solidFill>
           <a:ln>
             <a:noFill/>
@@ -3912,52 +4117,43 @@
       </p:sp>
       <p:sp>
         <p:nvSpPr>
-          <p:cNvPr id="2" name="Title 1"/>
-          <p:cNvSpPr>
-            <a:spLocks noGrp="1"/>
-          </p:cNvSpPr>
-          <p:nvPr>
-            <p:ph type="title"/>
-          </p:nvPr>
-        </p:nvSpPr>
-        <p:spPr>
-          <a:xfrm>
-            <a:off x="640080" y="457200"/>
-            <a:ext cx="4389120" cy="868680"/>
-          </a:xfrm>
-        </p:spPr>
-        <p:txBody>
-          <a:bodyPr wrap="square" lIns="54864" rIns="54864" tIns="27432" bIns="27432" anchor="ctr">
-            <a:noAutofit/>
-          </a:bodyPr>
-          <a:lstStyle/>
-          <a:p>
-            <a:pPr algn="l">
-              <a:lnSpc>
-                <a:spcPct val="105000"/>
-              </a:lnSpc>
-            </a:pPr>
-            <a:r>
-              <a:rPr sz="2600" b="1" i="0">
-                <a:solidFill>
-                  <a:srgbClr val="70311A"/>
-                </a:solidFill>
-              </a:rPr>
-              <a:t>메모 한 장 남기기</a:t>
-            </a:r>
-          </a:p>
-        </p:txBody>
-      </p:sp>
-      <p:sp>
-        <p:nvSpPr>
-          <p:cNvPr id="4" name="번호"/>
+          <p:cNvPr id="4" name="장식"/>
+          <p:cNvSpPr/>
+          <p:nvPr/>
+        </p:nvSpPr>
+        <p:spPr>
+          <a:xfrm>
+            <a:off x="3017520" y="1572768"/>
+            <a:ext cx="822960" cy="22860"/>
+          </a:xfrm>
+          <a:prstGeom prst="rect">
+            <a:avLst/>
+          </a:prstGeom>
+          <a:solidFill>
+            <a:srgbClr val="D88C79"/>
+          </a:solidFill>
+          <a:ln>
+            <a:noFill/>
+          </a:ln>
+        </p:spPr>
+        <p:txBody>
+          <a:bodyPr rtlCol="0" anchor="ctr"/>
+          <a:lstStyle/>
+          <a:p>
+            <a:pPr algn="ctr"/>
+          </a:p>
+        </p:txBody>
+      </p:sp>
+      <p:sp>
+        <p:nvSpPr>
+          <p:cNvPr id="5" name="상단 라벨"/>
           <p:cNvSpPr txBox="1"/>
           <p:nvPr/>
         </p:nvSpPr>
         <p:spPr>
           <a:xfrm>
-            <a:off x="640080" y="1691640"/>
-            <a:ext cx="2194560" cy="1280160"/>
+            <a:off x="640080" y="182880"/>
+            <a:ext cx="3657600" cy="274320"/>
           </a:xfrm>
           <a:prstGeom prst="rect">
             <a:avLst/>
@@ -3965,7 +4161,7 @@
           <a:noFill/>
         </p:spPr>
         <p:txBody>
-          <a:bodyPr wrap="square" lIns="54864" rIns="54864" tIns="27432" bIns="27432" anchor="t">
+          <a:bodyPr wrap="square" lIns="54864" rIns="54864" tIns="27432" bIns="27432" anchor="ctr">
             <a:noAutofit/>
           </a:bodyPr>
           <a:lstStyle/>
@@ -3976,9 +4172,85 @@
               </a:lnSpc>
             </a:pPr>
             <a:r>
+              <a:rPr sz="800" b="1" i="0" spc="250">
+                <a:solidFill>
+                  <a:srgbClr val="8E8780"/>
+                </a:solidFill>
+              </a:rPr>
+              <a:t>CARD NEWS</a:t>
+            </a:r>
+          </a:p>
+        </p:txBody>
+      </p:sp>
+      <p:sp>
+        <p:nvSpPr>
+          <p:cNvPr id="2" name="Title 1"/>
+          <p:cNvSpPr>
+            <a:spLocks noGrp="1"/>
+          </p:cNvSpPr>
+          <p:nvPr>
+            <p:ph type="title"/>
+          </p:nvPr>
+        </p:nvSpPr>
+        <p:spPr>
+          <a:xfrm>
+            <a:off x="1371600" y="640080"/>
+            <a:ext cx="4114800" cy="868680"/>
+          </a:xfrm>
+        </p:spPr>
+        <p:txBody>
+          <a:bodyPr wrap="square" lIns="54864" rIns="54864" tIns="27432" bIns="27432" anchor="ctr">
+            <a:noAutofit/>
+          </a:bodyPr>
+          <a:lstStyle/>
+          <a:p>
+            <a:pPr algn="ctr">
+              <a:lnSpc>
+                <a:spcPct val="105000"/>
+              </a:lnSpc>
+            </a:pPr>
+            <a:r>
+              <a:rPr sz="2600" b="1" i="0">
+                <a:solidFill>
+                  <a:srgbClr val="26231F"/>
+                </a:solidFill>
+              </a:rPr>
+              <a:t>메모 한 장 남기기</a:t>
+            </a:r>
+          </a:p>
+        </p:txBody>
+      </p:sp>
+      <p:sp>
+        <p:nvSpPr>
+          <p:cNvPr id="6" name="번호"/>
+          <p:cNvSpPr txBox="1"/>
+          <p:nvPr/>
+        </p:nvSpPr>
+        <p:spPr>
+          <a:xfrm>
+            <a:off x="640080" y="1874519"/>
+            <a:ext cx="2194560" cy="1280160"/>
+          </a:xfrm>
+          <a:prstGeom prst="rect">
+            <a:avLst/>
+          </a:prstGeom>
+          <a:noFill/>
+        </p:spPr>
+        <p:txBody>
+          <a:bodyPr wrap="square" lIns="54864" rIns="54864" tIns="27432" bIns="27432" anchor="t">
+            <a:noAutofit/>
+          </a:bodyPr>
+          <a:lstStyle/>
+          <a:p>
+            <a:pPr algn="l">
+              <a:lnSpc>
+                <a:spcPct val="115000"/>
+              </a:lnSpc>
+            </a:pPr>
+            <a:r>
               <a:rPr sz="6600" b="1" i="0">
                 <a:solidFill>
-                  <a:srgbClr val="ED6231"/>
+                  <a:srgbClr val="D88C79"/>
                 </a:solidFill>
               </a:rPr>
               <a:t>03</a:t>
@@ -3988,13 +4260,13 @@
       </p:sp>
       <p:sp>
         <p:nvSpPr>
-          <p:cNvPr id="5" name="본문"/>
+          <p:cNvPr id="7" name="본문"/>
           <p:cNvSpPr txBox="1"/>
           <p:nvPr/>
         </p:nvSpPr>
         <p:spPr>
           <a:xfrm>
-            <a:off x="640080" y="3154680"/>
+            <a:off x="640080" y="3337560"/>
             <a:ext cx="5577840" cy="2651760"/>
           </a:xfrm>
           <a:prstGeom prst="rect">
@@ -4016,7 +4288,7 @@
             <a:r>
               <a:rPr sz="2800" b="0" i="0">
                 <a:solidFill>
-                  <a:srgbClr val="2B2B2B"/>
+                  <a:srgbClr val="26231F"/>
                 </a:solidFill>
               </a:rPr>
               <a:t>생각났을 때 적어 두면 다음 주의 내가 고마워해요.</a:t>
@@ -4026,13 +4298,13 @@
       </p:sp>
       <p:sp>
         <p:nvSpPr>
-          <p:cNvPr id="6" name="쪽 번호"/>
+          <p:cNvPr id="8" name="쪽 번호"/>
           <p:cNvSpPr txBox="1"/>
           <p:nvPr/>
         </p:nvSpPr>
         <p:spPr>
           <a:xfrm>
-            <a:off x="640080" y="6035040"/>
+            <a:off x="640080" y="5989320"/>
             <a:ext cx="5577840" cy="365760"/>
           </a:xfrm>
           <a:prstGeom prst="rect">
@@ -4076,7 +4348,7 @@
     <p:bg>
       <p:bgPr>
         <a:solidFill>
-          <a:srgbClr val="FEF8F6"/>
+          <a:srgbClr val="FBEFEC"/>
         </a:solidFill>
         <a:effectLst/>
       </p:bgPr>
@@ -4090,23 +4362,20 @@
       <p:grpSpPr/>
       <p:sp>
         <p:nvSpPr>
-          <p:cNvPr id="3" name="장식"/>
+          <p:cNvPr id="3" name="포인트"/>
           <p:cNvSpPr/>
           <p:nvPr/>
         </p:nvSpPr>
         <p:spPr>
-          <a:xfrm rot="10800000">
-            <a:off x="5303520" y="0"/>
-            <a:ext cx="914400" cy="1554480"/>
+          <a:xfrm>
+            <a:off x="3291840" y="246888"/>
+            <a:ext cx="274320" cy="274320"/>
           </a:xfrm>
           <a:prstGeom prst="round2SameRect">
-            <a:avLst>
-              <a:gd name="adj1" fmla="val 50000"/>
-              <a:gd name="adj2" fmla="val 0"/>
-            </a:avLst>
+            <a:avLst/>
           </a:prstGeom>
           <a:solidFill>
-            <a:srgbClr val="FDE6DD"/>
+            <a:srgbClr val="D88C79"/>
           </a:solidFill>
           <a:ln>
             <a:noFill/>
@@ -4122,52 +4391,43 @@
       </p:sp>
       <p:sp>
         <p:nvSpPr>
-          <p:cNvPr id="2" name="Title 1"/>
-          <p:cNvSpPr>
-            <a:spLocks noGrp="1"/>
-          </p:cNvSpPr>
-          <p:nvPr>
-            <p:ph type="title"/>
-          </p:nvPr>
-        </p:nvSpPr>
-        <p:spPr>
-          <a:xfrm>
-            <a:off x="640080" y="457200"/>
-            <a:ext cx="4389120" cy="868680"/>
-          </a:xfrm>
-        </p:spPr>
-        <p:txBody>
-          <a:bodyPr wrap="square" lIns="54864" rIns="54864" tIns="27432" bIns="27432" anchor="ctr">
-            <a:noAutofit/>
-          </a:bodyPr>
-          <a:lstStyle/>
-          <a:p>
-            <a:pPr algn="l">
-              <a:lnSpc>
-                <a:spcPct val="105000"/>
-              </a:lnSpc>
-            </a:pPr>
-            <a:r>
-              <a:rPr sz="2600" b="1" i="0">
-                <a:solidFill>
-                  <a:srgbClr val="70311A"/>
-                </a:solidFill>
-              </a:rPr>
-              <a:t>퇴근길 한 정거장 걷기</a:t>
-            </a:r>
-          </a:p>
-        </p:txBody>
-      </p:sp>
-      <p:sp>
-        <p:nvSpPr>
-          <p:cNvPr id="4" name="번호"/>
+          <p:cNvPr id="4" name="장식"/>
+          <p:cNvSpPr/>
+          <p:nvPr/>
+        </p:nvSpPr>
+        <p:spPr>
+          <a:xfrm>
+            <a:off x="3017520" y="1572768"/>
+            <a:ext cx="822960" cy="22860"/>
+          </a:xfrm>
+          <a:prstGeom prst="rect">
+            <a:avLst/>
+          </a:prstGeom>
+          <a:solidFill>
+            <a:srgbClr val="D88C79"/>
+          </a:solidFill>
+          <a:ln>
+            <a:noFill/>
+          </a:ln>
+        </p:spPr>
+        <p:txBody>
+          <a:bodyPr rtlCol="0" anchor="ctr"/>
+          <a:lstStyle/>
+          <a:p>
+            <a:pPr algn="ctr"/>
+          </a:p>
+        </p:txBody>
+      </p:sp>
+      <p:sp>
+        <p:nvSpPr>
+          <p:cNvPr id="5" name="상단 라벨"/>
           <p:cNvSpPr txBox="1"/>
           <p:nvPr/>
         </p:nvSpPr>
         <p:spPr>
           <a:xfrm>
-            <a:off x="640080" y="1691640"/>
-            <a:ext cx="2194560" cy="1280160"/>
+            <a:off x="640080" y="182880"/>
+            <a:ext cx="3657600" cy="274320"/>
           </a:xfrm>
           <a:prstGeom prst="rect">
             <a:avLst/>
@@ -4175,7 +4435,7 @@
           <a:noFill/>
         </p:spPr>
         <p:txBody>
-          <a:bodyPr wrap="square" lIns="54864" rIns="54864" tIns="27432" bIns="27432" anchor="t">
+          <a:bodyPr wrap="square" lIns="54864" rIns="54864" tIns="27432" bIns="27432" anchor="ctr">
             <a:noAutofit/>
           </a:bodyPr>
           <a:lstStyle/>
@@ -4186,9 +4446,85 @@
               </a:lnSpc>
             </a:pPr>
             <a:r>
+              <a:rPr sz="800" b="1" i="0" spc="250">
+                <a:solidFill>
+                  <a:srgbClr val="8E8780"/>
+                </a:solidFill>
+              </a:rPr>
+              <a:t>CARD NEWS</a:t>
+            </a:r>
+          </a:p>
+        </p:txBody>
+      </p:sp>
+      <p:sp>
+        <p:nvSpPr>
+          <p:cNvPr id="2" name="Title 1"/>
+          <p:cNvSpPr>
+            <a:spLocks noGrp="1"/>
+          </p:cNvSpPr>
+          <p:nvPr>
+            <p:ph type="title"/>
+          </p:nvPr>
+        </p:nvSpPr>
+        <p:spPr>
+          <a:xfrm>
+            <a:off x="1371600" y="640080"/>
+            <a:ext cx="4114800" cy="868680"/>
+          </a:xfrm>
+        </p:spPr>
+        <p:txBody>
+          <a:bodyPr wrap="square" lIns="54864" rIns="54864" tIns="27432" bIns="27432" anchor="ctr">
+            <a:noAutofit/>
+          </a:bodyPr>
+          <a:lstStyle/>
+          <a:p>
+            <a:pPr algn="ctr">
+              <a:lnSpc>
+                <a:spcPct val="105000"/>
+              </a:lnSpc>
+            </a:pPr>
+            <a:r>
+              <a:rPr sz="2600" b="1" i="0">
+                <a:solidFill>
+                  <a:srgbClr val="26231F"/>
+                </a:solidFill>
+              </a:rPr>
+              <a:t>퇴근길 한 정거장 걷기</a:t>
+            </a:r>
+          </a:p>
+        </p:txBody>
+      </p:sp>
+      <p:sp>
+        <p:nvSpPr>
+          <p:cNvPr id="6" name="번호"/>
+          <p:cNvSpPr txBox="1"/>
+          <p:nvPr/>
+        </p:nvSpPr>
+        <p:spPr>
+          <a:xfrm>
+            <a:off x="640080" y="1874519"/>
+            <a:ext cx="2194560" cy="1280160"/>
+          </a:xfrm>
+          <a:prstGeom prst="rect">
+            <a:avLst/>
+          </a:prstGeom>
+          <a:noFill/>
+        </p:spPr>
+        <p:txBody>
+          <a:bodyPr wrap="square" lIns="54864" rIns="54864" tIns="27432" bIns="27432" anchor="t">
+            <a:noAutofit/>
+          </a:bodyPr>
+          <a:lstStyle/>
+          <a:p>
+            <a:pPr algn="l">
+              <a:lnSpc>
+                <a:spcPct val="115000"/>
+              </a:lnSpc>
+            </a:pPr>
+            <a:r>
               <a:rPr sz="6600" b="1" i="0">
                 <a:solidFill>
-                  <a:srgbClr val="ED6231"/>
+                  <a:srgbClr val="D88C79"/>
                 </a:solidFill>
               </a:rPr>
               <a:t>04</a:t>
@@ -4198,13 +4534,13 @@
       </p:sp>
       <p:sp>
         <p:nvSpPr>
-          <p:cNvPr id="5" name="본문"/>
+          <p:cNvPr id="7" name="본문"/>
           <p:cNvSpPr txBox="1"/>
           <p:nvPr/>
         </p:nvSpPr>
         <p:spPr>
           <a:xfrm>
-            <a:off x="640080" y="3154680"/>
+            <a:off x="640080" y="3337560"/>
             <a:ext cx="5577840" cy="2651760"/>
           </a:xfrm>
           <a:prstGeom prst="rect">
@@ -4226,7 +4562,7 @@
             <a:r>
               <a:rPr sz="2800" b="0" i="0">
                 <a:solidFill>
-                  <a:srgbClr val="2B2B2B"/>
+                  <a:srgbClr val="26231F"/>
                 </a:solidFill>
               </a:rPr>
               <a:t>한 정거장 먼저 내려 걸으면 머리가 정리돼요.</a:t>
@@ -4236,13 +4572,13 @@
       </p:sp>
       <p:sp>
         <p:nvSpPr>
-          <p:cNvPr id="6" name="쪽 번호"/>
+          <p:cNvPr id="8" name="쪽 번호"/>
           <p:cNvSpPr txBox="1"/>
           <p:nvPr/>
         </p:nvSpPr>
         <p:spPr>
           <a:xfrm>
-            <a:off x="640080" y="6035040"/>
+            <a:off x="640080" y="5989320"/>
             <a:ext cx="5577840" cy="365760"/>
           </a:xfrm>
           <a:prstGeom prst="rect">
@@ -4286,7 +4622,7 @@
     <p:bg>
       <p:bgPr>
         <a:solidFill>
-          <a:srgbClr val="FEF8F6"/>
+          <a:srgbClr val="FBEFEC"/>
         </a:solidFill>
         <a:effectLst/>
       </p:bgPr>
@@ -4300,23 +4636,20 @@
       <p:grpSpPr/>
       <p:sp>
         <p:nvSpPr>
-          <p:cNvPr id="3" name="장식"/>
+          <p:cNvPr id="3" name="포인트"/>
           <p:cNvSpPr/>
           <p:nvPr/>
         </p:nvSpPr>
         <p:spPr>
-          <a:xfrm rot="10800000">
-            <a:off x="5303520" y="0"/>
-            <a:ext cx="914400" cy="1554480"/>
+          <a:xfrm>
+            <a:off x="3291840" y="246888"/>
+            <a:ext cx="274320" cy="274320"/>
           </a:xfrm>
           <a:prstGeom prst="round2SameRect">
-            <a:avLst>
-              <a:gd name="adj1" fmla="val 50000"/>
-              <a:gd name="adj2" fmla="val 0"/>
-            </a:avLst>
+            <a:avLst/>
           </a:prstGeom>
           <a:solidFill>
-            <a:srgbClr val="FDE6DD"/>
+            <a:srgbClr val="D88C79"/>
           </a:solidFill>
           <a:ln>
             <a:noFill/>
@@ -4332,52 +4665,43 @@
       </p:sp>
       <p:sp>
         <p:nvSpPr>
-          <p:cNvPr id="2" name="Title 1"/>
-          <p:cNvSpPr>
-            <a:spLocks noGrp="1"/>
-          </p:cNvSpPr>
-          <p:nvPr>
-            <p:ph type="title"/>
-          </p:nvPr>
-        </p:nvSpPr>
-        <p:spPr>
-          <a:xfrm>
-            <a:off x="640080" y="457200"/>
-            <a:ext cx="4389120" cy="868680"/>
-          </a:xfrm>
-        </p:spPr>
-        <p:txBody>
-          <a:bodyPr wrap="square" lIns="54864" rIns="54864" tIns="27432" bIns="27432" anchor="ctr">
-            <a:noAutofit/>
-          </a:bodyPr>
-          <a:lstStyle/>
-          <a:p>
-            <a:pPr algn="l">
-              <a:lnSpc>
-                <a:spcPct val="105000"/>
-              </a:lnSpc>
-            </a:pPr>
-            <a:r>
-              <a:rPr sz="2600" b="1" i="0">
-                <a:solidFill>
-                  <a:srgbClr val="70311A"/>
-                </a:solidFill>
-              </a:rPr>
-              <a:t>오늘은 일찍 자기</a:t>
-            </a:r>
-          </a:p>
-        </p:txBody>
-      </p:sp>
-      <p:sp>
-        <p:nvSpPr>
-          <p:cNvPr id="4" name="번호"/>
+          <p:cNvPr id="4" name="장식"/>
+          <p:cNvSpPr/>
+          <p:nvPr/>
+        </p:nvSpPr>
+        <p:spPr>
+          <a:xfrm>
+            <a:off x="3017520" y="1572768"/>
+            <a:ext cx="822960" cy="22860"/>
+          </a:xfrm>
+          <a:prstGeom prst="rect">
+            <a:avLst/>
+          </a:prstGeom>
+          <a:solidFill>
+            <a:srgbClr val="D88C79"/>
+          </a:solidFill>
+          <a:ln>
+            <a:noFill/>
+          </a:ln>
+        </p:spPr>
+        <p:txBody>
+          <a:bodyPr rtlCol="0" anchor="ctr"/>
+          <a:lstStyle/>
+          <a:p>
+            <a:pPr algn="ctr"/>
+          </a:p>
+        </p:txBody>
+      </p:sp>
+      <p:sp>
+        <p:nvSpPr>
+          <p:cNvPr id="5" name="상단 라벨"/>
           <p:cNvSpPr txBox="1"/>
           <p:nvPr/>
         </p:nvSpPr>
         <p:spPr>
           <a:xfrm>
-            <a:off x="640080" y="1691640"/>
-            <a:ext cx="2194560" cy="1280160"/>
+            <a:off x="640080" y="182880"/>
+            <a:ext cx="3657600" cy="274320"/>
           </a:xfrm>
           <a:prstGeom prst="rect">
             <a:avLst/>
@@ -4385,7 +4709,7 @@
           <a:noFill/>
         </p:spPr>
         <p:txBody>
-          <a:bodyPr wrap="square" lIns="54864" rIns="54864" tIns="27432" bIns="27432" anchor="t">
+          <a:bodyPr wrap="square" lIns="54864" rIns="54864" tIns="27432" bIns="27432" anchor="ctr">
             <a:noAutofit/>
           </a:bodyPr>
           <a:lstStyle/>
@@ -4396,9 +4720,85 @@
               </a:lnSpc>
             </a:pPr>
             <a:r>
+              <a:rPr sz="800" b="1" i="0" spc="250">
+                <a:solidFill>
+                  <a:srgbClr val="8E8780"/>
+                </a:solidFill>
+              </a:rPr>
+              <a:t>CARD NEWS</a:t>
+            </a:r>
+          </a:p>
+        </p:txBody>
+      </p:sp>
+      <p:sp>
+        <p:nvSpPr>
+          <p:cNvPr id="2" name="Title 1"/>
+          <p:cNvSpPr>
+            <a:spLocks noGrp="1"/>
+          </p:cNvSpPr>
+          <p:nvPr>
+            <p:ph type="title"/>
+          </p:nvPr>
+        </p:nvSpPr>
+        <p:spPr>
+          <a:xfrm>
+            <a:off x="1371600" y="640080"/>
+            <a:ext cx="4114800" cy="868680"/>
+          </a:xfrm>
+        </p:spPr>
+        <p:txBody>
+          <a:bodyPr wrap="square" lIns="54864" rIns="54864" tIns="27432" bIns="27432" anchor="ctr">
+            <a:noAutofit/>
+          </a:bodyPr>
+          <a:lstStyle/>
+          <a:p>
+            <a:pPr algn="ctr">
+              <a:lnSpc>
+                <a:spcPct val="105000"/>
+              </a:lnSpc>
+            </a:pPr>
+            <a:r>
+              <a:rPr sz="2600" b="1" i="0">
+                <a:solidFill>
+                  <a:srgbClr val="26231F"/>
+                </a:solidFill>
+              </a:rPr>
+              <a:t>오늘은 일찍 자기</a:t>
+            </a:r>
+          </a:p>
+        </p:txBody>
+      </p:sp>
+      <p:sp>
+        <p:nvSpPr>
+          <p:cNvPr id="6" name="번호"/>
+          <p:cNvSpPr txBox="1"/>
+          <p:nvPr/>
+        </p:nvSpPr>
+        <p:spPr>
+          <a:xfrm>
+            <a:off x="640080" y="1874519"/>
+            <a:ext cx="2194560" cy="1280160"/>
+          </a:xfrm>
+          <a:prstGeom prst="rect">
+            <a:avLst/>
+          </a:prstGeom>
+          <a:noFill/>
+        </p:spPr>
+        <p:txBody>
+          <a:bodyPr wrap="square" lIns="54864" rIns="54864" tIns="27432" bIns="27432" anchor="t">
+            <a:noAutofit/>
+          </a:bodyPr>
+          <a:lstStyle/>
+          <a:p>
+            <a:pPr algn="l">
+              <a:lnSpc>
+                <a:spcPct val="115000"/>
+              </a:lnSpc>
+            </a:pPr>
+            <a:r>
               <a:rPr sz="6600" b="1" i="0">
                 <a:solidFill>
-                  <a:srgbClr val="ED6231"/>
+                  <a:srgbClr val="D88C79"/>
                 </a:solidFill>
               </a:rPr>
               <a:t>05</a:t>
@@ -4408,13 +4808,13 @@
       </p:sp>
       <p:sp>
         <p:nvSpPr>
-          <p:cNvPr id="5" name="본문"/>
+          <p:cNvPr id="7" name="본문"/>
           <p:cNvSpPr txBox="1"/>
           <p:nvPr/>
         </p:nvSpPr>
         <p:spPr>
           <a:xfrm>
-            <a:off x="640080" y="3154680"/>
+            <a:off x="640080" y="3337560"/>
             <a:ext cx="5577840" cy="2651760"/>
           </a:xfrm>
           <a:prstGeom prst="rect">
@@ -4436,7 +4836,7 @@
             <a:r>
               <a:rPr sz="2800" b="0" i="0">
                 <a:solidFill>
-                  <a:srgbClr val="2B2B2B"/>
+                  <a:srgbClr val="26231F"/>
                 </a:solidFill>
               </a:rPr>
               <a:t>미룬 일은 내일 해도 돼요. 오늘은 불을 일찍 끄세요.</a:t>
@@ -4446,13 +4846,13 @@
       </p:sp>
       <p:sp>
         <p:nvSpPr>
-          <p:cNvPr id="6" name="쪽 번호"/>
+          <p:cNvPr id="8" name="쪽 번호"/>
           <p:cNvSpPr txBox="1"/>
           <p:nvPr/>
         </p:nvSpPr>
         <p:spPr>
           <a:xfrm>
-            <a:off x="640080" y="6035040"/>
+            <a:off x="640080" y="5989320"/>
             <a:ext cx="5577840" cy="365760"/>
           </a:xfrm>
           <a:prstGeom prst="rect">
@@ -4493,6 +4893,14 @@
 <file path=ppt/slides/slide7.xml><?xml version="1.0" encoding="utf-8"?>
 <p:sld xmlns:a="http://schemas.openxmlformats.org/drawingml/2006/main" xmlns:p="http://schemas.openxmlformats.org/presentationml/2006/main" xmlns:r="http://schemas.openxmlformats.org/officeDocument/2006/relationships">
   <p:cSld>
+    <p:bg>
+      <p:bgPr>
+        <a:solidFill>
+          <a:srgbClr val="492E27"/>
+        </a:solidFill>
+        <a:effectLst/>
+      </p:bgPr>
+    </p:bg>
     <p:spTree>
       <p:nvGrpSpPr>
         <p:cNvPr id="1" name=""/>
@@ -4500,30 +4908,102 @@
         <p:nvPr/>
       </p:nvGrpSpPr>
       <p:grpSpPr/>
-      <p:pic>
-        <p:nvPicPr>
-          <p:cNvPr id="3" name="표지 그림" descr="news-30.jpg"/>
-          <p:cNvPicPr>
-            <a:picLocks noChangeAspect="1"/>
-          </p:cNvPicPr>
+      <p:sp>
+        <p:nvSpPr>
+          <p:cNvPr id="3" name="장식"/>
+          <p:cNvSpPr/>
           <p:nvPr/>
-        </p:nvPicPr>
-        <p:blipFill>
-          <a:blip r:embed="rId2"/>
-          <a:stretch>
-            <a:fillRect/>
-          </a:stretch>
-        </p:blipFill>
-        <p:spPr>
-          <a:xfrm>
-            <a:off x="0" y="0"/>
-            <a:ext cx="6858000" cy="6858000"/>
+        </p:nvSpPr>
+        <p:spPr>
+          <a:xfrm>
+            <a:off x="1600200" y="822960"/>
+            <a:ext cx="3657600" cy="3657600"/>
+          </a:xfrm>
+          <a:prstGeom prst="ellipse">
+            <a:avLst/>
+          </a:prstGeom>
+          <a:solidFill>
+            <a:srgbClr val="D88C79"/>
+          </a:solidFill>
+          <a:ln>
+            <a:noFill/>
+          </a:ln>
+        </p:spPr>
+        <p:txBody>
+          <a:bodyPr rtlCol="0" anchor="ctr"/>
+          <a:lstStyle/>
+          <a:p>
+            <a:pPr algn="ctr"/>
+          </a:p>
+        </p:txBody>
+      </p:sp>
+      <p:sp>
+        <p:nvSpPr>
+          <p:cNvPr id="4" name="장식"/>
+          <p:cNvSpPr/>
+          <p:nvPr/>
+        </p:nvSpPr>
+        <p:spPr>
+          <a:xfrm>
+            <a:off x="3246120" y="502920"/>
+            <a:ext cx="822960" cy="822960"/>
+          </a:xfrm>
+          <a:prstGeom prst="ellipse">
+            <a:avLst/>
+          </a:prstGeom>
+          <a:solidFill>
+            <a:srgbClr val="A66B5C"/>
+          </a:solidFill>
+          <a:ln>
+            <a:noFill/>
+          </a:ln>
+        </p:spPr>
+        <p:txBody>
+          <a:bodyPr rtlCol="0" anchor="ctr"/>
+          <a:lstStyle/>
+          <a:p>
+            <a:pPr algn="ctr"/>
+          </a:p>
+        </p:txBody>
+      </p:sp>
+      <p:sp>
+        <p:nvSpPr>
+          <p:cNvPr id="5" name="라벨"/>
+          <p:cNvSpPr txBox="1"/>
+          <p:nvPr/>
+        </p:nvSpPr>
+        <p:spPr>
+          <a:xfrm>
+            <a:off x="731520" y="4572000"/>
+            <a:ext cx="5394960" cy="274320"/>
           </a:xfrm>
           <a:prstGeom prst="rect">
             <a:avLst/>
           </a:prstGeom>
-        </p:spPr>
-      </p:pic>
+          <a:noFill/>
+        </p:spPr>
+        <p:txBody>
+          <a:bodyPr wrap="square" lIns="54864" rIns="54864" tIns="27432" bIns="27432" anchor="t">
+            <a:noAutofit/>
+          </a:bodyPr>
+          <a:lstStyle/>
+          <a:p>
+            <a:pPr algn="ctr">
+              <a:lnSpc>
+                <a:spcPct val="115000"/>
+              </a:lnSpc>
+            </a:pPr>
+            <a:r>
+              <a:rPr sz="1000" b="1" i="0" spc="250">
+                <a:solidFill>
+                  <a:srgbClr val="FFFFFF"/>
+                </a:solidFill>
+              </a:rPr>
+              <a:t>CARD NEWS</a:t>
+            </a:r>
+          </a:p>
+        </p:txBody>
+      </p:sp>
       <p:sp>
         <p:nvSpPr>
           <p:cNvPr id="2" name="Title 1"/>
@@ -4536,8 +5016,8 @@
         </p:nvSpPr>
         <p:spPr>
           <a:xfrm>
-            <a:off x="685800" y="960120"/>
-            <a:ext cx="5486400" cy="1463040"/>
+            <a:off x="731520" y="4892040"/>
+            <a:ext cx="5394960" cy="914400"/>
           </a:xfrm>
         </p:spPr>
         <p:txBody>
@@ -4546,7 +5026,7 @@
           </a:bodyPr>
           <a:lstStyle/>
           <a:p>
-            <a:pPr algn="l">
+            <a:pPr algn="ctr">
               <a:lnSpc>
                 <a:spcPct val="105000"/>
               </a:lnSpc>
@@ -4554,7 +5034,7 @@
             <a:r>
               <a:rPr sz="2800" b="1" i="0">
                 <a:solidFill>
-                  <a:srgbClr val="70311A"/>
+                  <a:srgbClr val="FFFFFF"/>
                 </a:solidFill>
               </a:rPr>
               <a:t>저장해 두고 필요할 때 꺼내 보세요</a:t>
@@ -4564,14 +5044,14 @@
       </p:sp>
       <p:sp>
         <p:nvSpPr>
-          <p:cNvPr id="4" name="한 줄 문구"/>
+          <p:cNvPr id="6" name="한 줄 문구"/>
           <p:cNvSpPr txBox="1"/>
           <p:nvPr/>
         </p:nvSpPr>
         <p:spPr>
           <a:xfrm>
-            <a:off x="685800" y="2560320"/>
-            <a:ext cx="5486400" cy="822960"/>
+            <a:off x="731520" y="5806440"/>
+            <a:ext cx="5394960" cy="822960"/>
           </a:xfrm>
           <a:prstGeom prst="rect">
             <a:avLst/>
@@ -4584,15 +5064,15 @@
           </a:bodyPr>
           <a:lstStyle/>
           <a:p>
-            <a:pPr algn="l">
+            <a:pPr algn="ctr">
               <a:lnSpc>
                 <a:spcPct val="115000"/>
               </a:lnSpc>
             </a:pPr>
             <a:r>
-              <a:rPr sz="1500" b="0" i="1">
+              <a:rPr sz="1500" b="0" i="0">
                 <a:solidFill>
-                  <a:srgbClr val="70311A"/>
+                  <a:srgbClr val="FFFFFF"/>
                 </a:solidFill>
               </a:rPr>
               <a:t>마음에 들면 공유해 주세요</a:t>
@@ -4602,14 +5082,14 @@
       </p:sp>
       <p:sp>
         <p:nvSpPr>
-          <p:cNvPr id="5" name="안내 문구"/>
+          <p:cNvPr id="7" name="안내 문구"/>
           <p:cNvSpPr txBox="1"/>
           <p:nvPr/>
         </p:nvSpPr>
         <p:spPr>
           <a:xfrm>
-            <a:off x="685800" y="3429000"/>
-            <a:ext cx="5486400" cy="914400"/>
+            <a:off x="731520" y="6675120"/>
+            <a:ext cx="5394960" cy="914400"/>
           </a:xfrm>
           <a:prstGeom prst="rect">
             <a:avLst/>
@@ -4622,7 +5102,7 @@
           </a:bodyPr>
           <a:lstStyle/>
           <a:p>
-            <a:pPr algn="l">
+            <a:pPr algn="ctr">
               <a:lnSpc>
                 <a:spcPct val="115000"/>
               </a:lnSpc>
@@ -4630,7 +5110,7 @@
             <a:r>
               <a:rPr sz="1200" b="0" i="0">
                 <a:solidFill>
-                  <a:srgbClr val="666666"/>
+                  <a:srgbClr val="FFFFFF"/>
                 </a:solidFill>
               </a:rPr>
               <a:t>이름 · 연락처를 입력하세요</a:t>
@@ -4657,34 +5137,34 @@
         <a:sysClr val="window" lastClr="FFFFFF"/>
       </a:lt1>
       <a:dk2>
-        <a:srgbClr val="70311A"/>
+        <a:srgbClr val="492E27"/>
       </a:dk2>
       <a:lt2>
-        <a:srgbClr val="FEF8F6"/>
+        <a:srgbClr val="FBEFEC"/>
       </a:lt2>
       <a:accent1>
-        <a:srgbClr val="ED6231"/>
+        <a:srgbClr val="D88C79"/>
       </a:accent1>
       <a:accent2>
-        <a:srgbClr val="29A39B"/>
+        <a:srgbClr val="E1C998"/>
       </a:accent2>
       <a:accent3>
-        <a:srgbClr val="70311A"/>
+        <a:srgbClr val="492E27"/>
       </a:accent3>
       <a:accent4>
-        <a:srgbClr val="FDE6DD"/>
+        <a:srgbClr val="F6DCD5"/>
       </a:accent4>
       <a:accent5>
-        <a:srgbClr val="8B8266"/>
+        <a:srgbClr val="DCAA88"/>
       </a:accent5>
       <a:accent6>
-        <a:srgbClr val="A98376"/>
+        <a:srgbClr val="92827D"/>
       </a:accent6>
       <a:hlink>
-        <a:srgbClr val="ED6231"/>
+        <a:srgbClr val="D88C79"/>
       </a:hlink>
       <a:folHlink>
-        <a:srgbClr val="70311A"/>
+        <a:srgbClr val="492E27"/>
       </a:folHlink>
     </a:clrScheme>
     <a:fontScheme name="Office">
